--- a/packages/knowledge-seed/deliverable-shells/executive-summary-v1.pptx
+++ b/packages/knowledge-seed/deliverable-shells/executive-summary-v1.pptx
@@ -2181,9 +2181,6 @@
           <a:bodyPr wrap="square" lIns="0" tIns="0" rIns="0" bIns="0" rtlCol="0" anchor="t"/>
           <a:lstStyle/>
           <a:p>
-            <a:pPr indent="0" marL="0">
-              <a:buNone/>
-            </a:pPr>
             <a:r>
               <a:rPr lang="en-US" sz="1600" dirty="0">
                 <a:solidFill>
@@ -2193,9 +2190,8 @@
                 <a:ea typeface="Calibri" pitchFamily="34" charset="-122"/>
                 <a:cs typeface="Calibri" pitchFamily="34" charset="-120"/>
               </a:rPr>
-              <a:t>{{findings_bullet_list}}</a:t>
-            </a:r>
-            <a:endParaRPr lang="en-US" sz="1600" dirty="0"/>
+              <a:t>{{section_headline_findings}}</a:t>
+            </a:r>
           </a:p>
         </p:txBody>
       </p:sp>
@@ -2570,9 +2566,6 @@
           <a:bodyPr wrap="square" lIns="0" tIns="0" rIns="0" bIns="0" rtlCol="0" anchor="t"/>
           <a:lstStyle/>
           <a:p>
-            <a:pPr indent="0" marL="0">
-              <a:buNone/>
-            </a:pPr>
             <a:r>
               <a:rPr lang="en-US" sz="1600" dirty="0">
                 <a:solidFill>
@@ -2582,9 +2575,8 @@
                 <a:ea typeface="Calibri" pitchFamily="34" charset="-122"/>
                 <a:cs typeface="Calibri" pitchFamily="34" charset="-120"/>
               </a:rPr>
-              <a:t>{{risks_bullet_list}}</a:t>
-            </a:r>
-            <a:endParaRPr lang="en-US" sz="1600" dirty="0"/>
+              <a:t>{{section_top_risks}}</a:t>
+            </a:r>
           </a:p>
         </p:txBody>
       </p:sp>
@@ -2959,9 +2951,6 @@
           <a:bodyPr wrap="square" lIns="0" tIns="0" rIns="0" bIns="0" rtlCol="0" anchor="t"/>
           <a:lstStyle/>
           <a:p>
-            <a:pPr indent="0" marL="0">
-              <a:buNone/>
-            </a:pPr>
             <a:r>
               <a:rPr lang="en-US" sz="1600" dirty="0">
                 <a:solidFill>
@@ -2971,9 +2960,8 @@
                 <a:ea typeface="Calibri" pitchFamily="34" charset="-122"/>
                 <a:cs typeface="Calibri" pitchFamily="34" charset="-120"/>
               </a:rPr>
-              <a:t>{{recommendations_bullet_list}}</a:t>
-            </a:r>
-            <a:endParaRPr lang="en-US" sz="1600" dirty="0"/>
+              <a:t>{{section_executive_recommendations}}</a:t>
+            </a:r>
           </a:p>
         </p:txBody>
       </p:sp>

--- a/packages/knowledge-seed/deliverable-shells/executive-summary-v1.pptx
+++ b/packages/knowledge-seed/deliverable-shells/executive-summary-v1.pptx
@@ -1433,6 +1433,10 @@
             <a:prstDash val="solid"/>
           </a:ln>
         </p:spPr>
+        <p:txBody>
+          <a:bodyPr/>
+          <a:p/>
+        </p:txBody>
       </p:sp>
       <p:sp>
         <p:nvSpPr>
@@ -1575,6 +1579,10 @@
             <a:prstDash val="solid"/>
           </a:ln>
         </p:spPr>
+        <p:txBody>
+          <a:bodyPr/>
+          <a:p/>
+        </p:txBody>
       </p:sp>
       <p:sp>
         <p:nvSpPr>
@@ -1866,6 +1874,10 @@
             <a:prstDash val="solid"/>
           </a:ln>
         </p:spPr>
+        <p:txBody>
+          <a:bodyPr/>
+          <a:p/>
+        </p:txBody>
       </p:sp>
       <p:sp>
         <p:nvSpPr>
@@ -1889,6 +1901,10 @@
             <a:prstDash val="solid"/>
           </a:ln>
         </p:spPr>
+        <p:txBody>
+          <a:bodyPr/>
+          <a:p/>
+        </p:txBody>
       </p:sp>
       <p:sp>
         <p:nvSpPr>
@@ -2031,6 +2047,10 @@
             <a:prstDash val="solid"/>
           </a:ln>
         </p:spPr>
+        <p:txBody>
+          <a:bodyPr/>
+          <a:p/>
+        </p:txBody>
       </p:sp>
       <p:sp>
         <p:nvSpPr>
@@ -2095,6 +2115,10 @@
             <a:prstDash val="solid"/>
           </a:ln>
         </p:spPr>
+        <p:txBody>
+          <a:bodyPr/>
+          <a:p/>
+        </p:txBody>
       </p:sp>
       <p:sp>
         <p:nvSpPr>
@@ -2120,6 +2144,10 @@
             <a:prstDash val="solid"/>
           </a:ln>
         </p:spPr>
+        <p:txBody>
+          <a:bodyPr/>
+          <a:p/>
+        </p:txBody>
       </p:sp>
       <p:sp>
         <p:nvSpPr>
@@ -2178,7 +2206,9 @@
           <a:ln/>
         </p:spPr>
         <p:txBody>
-          <a:bodyPr wrap="square" lIns="0" tIns="0" rIns="0" bIns="0" rtlCol="0" anchor="t"/>
+          <a:bodyPr wrap="square" lIns="0" tIns="0" rIns="0" bIns="0" rtlCol="0" anchor="t">
+            <a:normAutofit/>
+          </a:bodyPr>
           <a:lstStyle/>
           <a:p>
             <a:r>
@@ -2251,6 +2281,10 @@
             <a:prstDash val="solid"/>
           </a:ln>
         </p:spPr>
+        <p:txBody>
+          <a:bodyPr/>
+          <a:p/>
+        </p:txBody>
       </p:sp>
       <p:sp>
         <p:nvSpPr>
@@ -2274,6 +2308,10 @@
             <a:prstDash val="solid"/>
           </a:ln>
         </p:spPr>
+        <p:txBody>
+          <a:bodyPr/>
+          <a:p/>
+        </p:txBody>
       </p:sp>
       <p:sp>
         <p:nvSpPr>
@@ -2416,6 +2454,10 @@
             <a:prstDash val="solid"/>
           </a:ln>
         </p:spPr>
+        <p:txBody>
+          <a:bodyPr/>
+          <a:p/>
+        </p:txBody>
       </p:sp>
       <p:sp>
         <p:nvSpPr>
@@ -2480,6 +2522,10 @@
             <a:prstDash val="solid"/>
           </a:ln>
         </p:spPr>
+        <p:txBody>
+          <a:bodyPr/>
+          <a:p/>
+        </p:txBody>
       </p:sp>
       <p:sp>
         <p:nvSpPr>
@@ -2505,6 +2551,10 @@
             <a:prstDash val="solid"/>
           </a:ln>
         </p:spPr>
+        <p:txBody>
+          <a:bodyPr/>
+          <a:p/>
+        </p:txBody>
       </p:sp>
       <p:sp>
         <p:nvSpPr>
@@ -2563,7 +2613,9 @@
           <a:ln/>
         </p:spPr>
         <p:txBody>
-          <a:bodyPr wrap="square" lIns="0" tIns="0" rIns="0" bIns="0" rtlCol="0" anchor="t"/>
+          <a:bodyPr wrap="square" lIns="0" tIns="0" rIns="0" bIns="0" rtlCol="0" anchor="t">
+            <a:normAutofit/>
+          </a:bodyPr>
           <a:lstStyle/>
           <a:p>
             <a:r>
@@ -2636,6 +2688,10 @@
             <a:prstDash val="solid"/>
           </a:ln>
         </p:spPr>
+        <p:txBody>
+          <a:bodyPr/>
+          <a:p/>
+        </p:txBody>
       </p:sp>
       <p:sp>
         <p:nvSpPr>
@@ -2659,6 +2715,10 @@
             <a:prstDash val="solid"/>
           </a:ln>
         </p:spPr>
+        <p:txBody>
+          <a:bodyPr/>
+          <a:p/>
+        </p:txBody>
       </p:sp>
       <p:sp>
         <p:nvSpPr>
@@ -2801,6 +2861,10 @@
             <a:prstDash val="solid"/>
           </a:ln>
         </p:spPr>
+        <p:txBody>
+          <a:bodyPr/>
+          <a:p/>
+        </p:txBody>
       </p:sp>
       <p:sp>
         <p:nvSpPr>
@@ -2865,6 +2929,10 @@
             <a:prstDash val="solid"/>
           </a:ln>
         </p:spPr>
+        <p:txBody>
+          <a:bodyPr/>
+          <a:p/>
+        </p:txBody>
       </p:sp>
       <p:sp>
         <p:nvSpPr>
@@ -2890,6 +2958,10 @@
             <a:prstDash val="solid"/>
           </a:ln>
         </p:spPr>
+        <p:txBody>
+          <a:bodyPr/>
+          <a:p/>
+        </p:txBody>
       </p:sp>
       <p:sp>
         <p:nvSpPr>
@@ -2948,7 +3020,9 @@
           <a:ln/>
         </p:spPr>
         <p:txBody>
-          <a:bodyPr wrap="square" lIns="0" tIns="0" rIns="0" bIns="0" rtlCol="0" anchor="t"/>
+          <a:bodyPr wrap="square" lIns="0" tIns="0" rIns="0" bIns="0" rtlCol="0" anchor="t">
+            <a:normAutofit/>
+          </a:bodyPr>
           <a:lstStyle/>
           <a:p>
             <a:r>
@@ -3021,6 +3095,10 @@
             <a:prstDash val="solid"/>
           </a:ln>
         </p:spPr>
+        <p:txBody>
+          <a:bodyPr/>
+          <a:p/>
+        </p:txBody>
       </p:sp>
       <p:sp>
         <p:nvSpPr>
@@ -3044,6 +3122,10 @@
             <a:prstDash val="solid"/>
           </a:ln>
         </p:spPr>
+        <p:txBody>
+          <a:bodyPr/>
+          <a:p/>
+        </p:txBody>
       </p:sp>
       <p:sp>
         <p:nvSpPr>
@@ -3186,6 +3268,10 @@
             <a:prstDash val="solid"/>
           </a:ln>
         </p:spPr>
+        <p:txBody>
+          <a:bodyPr/>
+          <a:p/>
+        </p:txBody>
       </p:sp>
       <p:sp>
         <p:nvSpPr>
@@ -3289,6 +3375,10 @@
             <a:prstDash val="solid"/>
           </a:ln>
         </p:spPr>
+        <p:txBody>
+          <a:bodyPr/>
+          <a:p/>
+        </p:txBody>
       </p:sp>
       <p:sp>
         <p:nvSpPr>
@@ -3314,6 +3404,10 @@
             <a:prstDash val="solid"/>
           </a:ln>
         </p:spPr>
+        <p:txBody>
+          <a:bodyPr/>
+          <a:p/>
+        </p:txBody>
       </p:sp>
       <p:sp>
         <p:nvSpPr>
@@ -3417,6 +3511,10 @@
             <a:prstDash val="solid"/>
           </a:ln>
         </p:spPr>
+        <p:txBody>
+          <a:bodyPr/>
+          <a:p/>
+        </p:txBody>
       </p:sp>
       <p:sp>
         <p:nvSpPr>
@@ -3442,6 +3540,10 @@
             <a:prstDash val="solid"/>
           </a:ln>
         </p:spPr>
+        <p:txBody>
+          <a:bodyPr/>
+          <a:p/>
+        </p:txBody>
       </p:sp>
       <p:sp>
         <p:nvSpPr>
@@ -3545,6 +3647,10 @@
             <a:prstDash val="solid"/>
           </a:ln>
         </p:spPr>
+        <p:txBody>
+          <a:bodyPr/>
+          <a:p/>
+        </p:txBody>
       </p:sp>
       <p:sp>
         <p:nvSpPr>
@@ -3570,6 +3676,10 @@
             <a:prstDash val="solid"/>
           </a:ln>
         </p:spPr>
+        <p:txBody>
+          <a:bodyPr/>
+          <a:p/>
+        </p:txBody>
       </p:sp>
       <p:sp>
         <p:nvSpPr>
@@ -3673,6 +3783,10 @@
             <a:prstDash val="solid"/>
           </a:ln>
         </p:spPr>
+        <p:txBody>
+          <a:bodyPr/>
+          <a:p/>
+        </p:txBody>
       </p:sp>
       <p:sp>
         <p:nvSpPr>
@@ -3698,6 +3812,10 @@
             <a:prstDash val="solid"/>
           </a:ln>
         </p:spPr>
+        <p:txBody>
+          <a:bodyPr/>
+          <a:p/>
+        </p:txBody>
       </p:sp>
       <p:sp>
         <p:nvSpPr>
@@ -3801,6 +3919,10 @@
             <a:prstDash val="solid"/>
           </a:ln>
         </p:spPr>
+        <p:txBody>
+          <a:bodyPr/>
+          <a:p/>
+        </p:txBody>
       </p:sp>
       <p:sp>
         <p:nvSpPr>
@@ -3904,6 +4026,10 @@
             <a:prstDash val="solid"/>
           </a:ln>
         </p:spPr>
+        <p:txBody>
+          <a:bodyPr/>
+          <a:p/>
+        </p:txBody>
       </p:sp>
       <p:sp>
         <p:nvSpPr>
@@ -4039,6 +4165,10 @@
             <a:prstDash val="solid"/>
           </a:ln>
         </p:spPr>
+        <p:txBody>
+          <a:bodyPr/>
+          <a:p/>
+        </p:txBody>
       </p:sp>
       <p:sp>
         <p:nvSpPr>
@@ -4062,6 +4192,10 @@
             <a:prstDash val="solid"/>
           </a:ln>
         </p:spPr>
+        <p:txBody>
+          <a:bodyPr/>
+          <a:p/>
+        </p:txBody>
       </p:sp>
       <p:sp>
         <p:nvSpPr>
@@ -4204,6 +4338,10 @@
             <a:prstDash val="solid"/>
           </a:ln>
         </p:spPr>
+        <p:txBody>
+          <a:bodyPr/>
+          <a:p/>
+        </p:txBody>
       </p:sp>
       <p:sp>
         <p:nvSpPr>
@@ -4768,6 +4906,10 @@
             <a:prstDash val="solid"/>
           </a:ln>
         </p:spPr>
+        <p:txBody>
+          <a:bodyPr/>
+          <a:p/>
+        </p:txBody>
       </p:sp>
       <p:sp>
         <p:nvSpPr>
@@ -4871,6 +5013,10 @@
             <a:prstDash val="solid"/>
           </a:ln>
         </p:spPr>
+        <p:txBody>
+          <a:bodyPr/>
+          <a:p/>
+        </p:txBody>
       </p:sp>
       <p:sp>
         <p:nvSpPr>
@@ -4896,6 +5042,10 @@
             <a:prstDash val="solid"/>
           </a:ln>
         </p:spPr>
+        <p:txBody>
+          <a:bodyPr/>
+          <a:p/>
+        </p:txBody>
       </p:sp>
       <p:sp>
         <p:nvSpPr>
@@ -5038,6 +5188,10 @@
             <a:prstDash val="solid"/>
           </a:ln>
         </p:spPr>
+        <p:txBody>
+          <a:bodyPr/>
+          <a:p/>
+        </p:txBody>
       </p:sp>
       <p:sp>
         <p:nvSpPr>
@@ -5063,6 +5217,10 @@
             <a:prstDash val="solid"/>
           </a:ln>
         </p:spPr>
+        <p:txBody>
+          <a:bodyPr/>
+          <a:p/>
+        </p:txBody>
       </p:sp>
       <p:sp>
         <p:nvSpPr>
@@ -5205,6 +5363,10 @@
             <a:prstDash val="solid"/>
           </a:ln>
         </p:spPr>
+        <p:txBody>
+          <a:bodyPr/>
+          <a:p/>
+        </p:txBody>
       </p:sp>
       <p:sp>
         <p:nvSpPr>
@@ -5230,6 +5392,10 @@
             <a:prstDash val="solid"/>
           </a:ln>
         </p:spPr>
+        <p:txBody>
+          <a:bodyPr/>
+          <a:p/>
+        </p:txBody>
       </p:sp>
       <p:sp>
         <p:nvSpPr>
@@ -5370,6 +5536,10 @@
             <a:prstDash val="solid"/>
           </a:ln>
         </p:spPr>
+        <p:txBody>
+          <a:bodyPr/>
+          <a:p/>
+        </p:txBody>
       </p:sp>
       <p:sp>
         <p:nvSpPr>
